--- a/Labellisez et appliquez des approches semi-supervisées en traitement d'images_Ronan_Menguy/Ronan_Menguy_1_Presentation_092026.pptx
+++ b/Labellisez et appliquez des approches semi-supervisées en traitement d'images_Ronan_Menguy/Ronan_Menguy_1_Presentation_092026.pptx
@@ -6804,7 +6804,7 @@
           <a:p>
             <a:fld id="{EEA68B2B-5F70-4113-9810-9B9DAA3FA51E}" type="datetimeFigureOut">
               <a:rPr lang="fr-FR" smtClean="0"/>
-              <a:t>10/10/2026</a:t>
+              <a:t>23/10/2026</a:t>
             </a:fld>
             <a:endParaRPr lang="fr-FR"/>
           </a:p>
@@ -7979,10 +7979,6 @@
           <a:bodyPr/>
           <a:lstStyle/>
           <a:p>
-            <a:r>
-              <a:rPr lang="fr-FR"/>
-              <a:t>Source : 01_exploration_dataset.ipynb, cellules hyperparametres-semi-recherche et hyperparametres-supervise-recherche, sorties enregistrées après alignement des cibles faibles et fortes. Phase faible : 5 et 10 époques donnent une accuracy de validation de 1,0000 par rapport aux groupes K-Means alignés. À égalité, le code retient 5 époques. F2 semi-supervisé : 0,4054 / 0,5263 / 0,5263 / 0,8537. F2 supervisé : 0,5000 / 0,6250 / 0,6579 / 0,9756. Les deux modèles retiennent un taux de 0,001 et 10 époques fortes. Le meilleur F2 de validation diffère entre modèles. Les 20 images du test final restent exclues de la sélection.</a:t>
-            </a:r>
             <a:endParaRPr lang="fr-FR" dirty="0"/>
           </a:p>
         </p:txBody>
@@ -8067,10 +8063,6 @@
           <a:bodyPr/>
           <a:lstStyle/>
           <a:p>
-            <a:r>
-              <a:rPr lang="fr-FR"/>
-              <a:t>Source : 01_exploration_dataset.ipynb, cellules ba2b3b8a, b184ba1a, 82faeff6 et 9dfb6484. La correspondance entre les groupes K-Means et les cibles du CNN est déterminée uniquement sur les 63 images fortes d'entraînement. Dans cette exécution, groupe 0 vers cible 1 (cancer), groupe 1 vers cible 0 (normal). Les numéros originaux restent dans label_faible. Les cibles du CNN sont alignées dans les phases faible et forte. Les labels faibles restent approximatifs. La validation faible applique la même correspondance. Après 5 époques faibles, accuracy de 0,973 sur les 263 images du test faible : accord avec les cibles dérivées de K-Means, et non évaluation médicale. Puis le même CNN poursuit son entraînement pendant 10 époques sur les 63 labels forts. Le supervisé apprend uniquement sur ces 63 images, pendant 10 époques. Taux de 0,001 pour les trois phases finales.</a:t>
-            </a:r>
             <a:endParaRPr lang="fr-FR" dirty="0"/>
           </a:p>
         </p:txBody>
@@ -8155,10 +8147,6 @@
           <a:bodyPr/>
           <a:lstStyle/>
           <a:p>
-            <a:r>
-              <a:rPr lang="fr-FR"/>
-              <a:t>Source : 01_exploration_dataset.ipynb, cellules ee07cebf et cnn-comparaison-train-test, sorties enregistrées après alignement des labels. Test fort : 20 images, 10 normales et 10 cancéreuses. Les deux modèles affichent accuracy, F1, précision, rappel et F2 cancer égaux à 0,900. Matrice de confusion pour chacun : [[9,1],[1,9]], lignes = classes réelles, colonnes = classes prédites. Un faux positif et un faux négatif par modèle. L'égalité concerne les métriques et les effectifs des matrices sur ce petit test, sans prouver que les modèles ou leurs prédictions individuelles sont identiques. Aucun gain mesuré du semi-supervisé sur ce test. Train fort, 63 images : F2 semi de 0,969 et supervisé de 0,943. Écarts de F2 train moins test : +6,9 et +4,3 points. Ces écarts suggèrent un possible surapprentissage, à interpréter avec prudence sur 20 images de test.</a:t>
-            </a:r>
             <a:endParaRPr lang="fr-FR" dirty="0"/>
           </a:p>
         </p:txBody>
@@ -8346,7 +8334,7 @@
           <a:p>
             <a:fld id="{3688A0B3-F8E5-4028-8F78-AD1068B82EBB}" type="datetimeFigureOut">
               <a:rPr lang="fr-FR" smtClean="0"/>
-              <a:t>10/10/2026</a:t>
+              <a:t>23/10/2026</a:t>
             </a:fld>
             <a:endParaRPr lang="fr-FR"/>
           </a:p>
@@ -8544,7 +8532,7 @@
           <a:p>
             <a:fld id="{3688A0B3-F8E5-4028-8F78-AD1068B82EBB}" type="datetimeFigureOut">
               <a:rPr lang="fr-FR" smtClean="0"/>
-              <a:t>10/10/2026</a:t>
+              <a:t>23/10/2026</a:t>
             </a:fld>
             <a:endParaRPr lang="fr-FR"/>
           </a:p>
@@ -8752,7 +8740,7 @@
           <a:p>
             <a:fld id="{3688A0B3-F8E5-4028-8F78-AD1068B82EBB}" type="datetimeFigureOut">
               <a:rPr lang="fr-FR" smtClean="0"/>
-              <a:t>10/10/2026</a:t>
+              <a:t>23/10/2026</a:t>
             </a:fld>
             <a:endParaRPr lang="fr-FR"/>
           </a:p>
@@ -8950,7 +8938,7 @@
           <a:p>
             <a:fld id="{3688A0B3-F8E5-4028-8F78-AD1068B82EBB}" type="datetimeFigureOut">
               <a:rPr lang="fr-FR" smtClean="0"/>
-              <a:t>10/10/2026</a:t>
+              <a:t>23/10/2026</a:t>
             </a:fld>
             <a:endParaRPr lang="fr-FR"/>
           </a:p>
@@ -9225,7 +9213,7 @@
           <a:p>
             <a:fld id="{3688A0B3-F8E5-4028-8F78-AD1068B82EBB}" type="datetimeFigureOut">
               <a:rPr lang="fr-FR" smtClean="0"/>
-              <a:t>10/10/2026</a:t>
+              <a:t>23/10/2026</a:t>
             </a:fld>
             <a:endParaRPr lang="fr-FR"/>
           </a:p>
@@ -9490,7 +9478,7 @@
           <a:p>
             <a:fld id="{3688A0B3-F8E5-4028-8F78-AD1068B82EBB}" type="datetimeFigureOut">
               <a:rPr lang="fr-FR" smtClean="0"/>
-              <a:t>10/10/2026</a:t>
+              <a:t>23/10/2026</a:t>
             </a:fld>
             <a:endParaRPr lang="fr-FR"/>
           </a:p>
@@ -9902,7 +9890,7 @@
           <a:p>
             <a:fld id="{3688A0B3-F8E5-4028-8F78-AD1068B82EBB}" type="datetimeFigureOut">
               <a:rPr lang="fr-FR" smtClean="0"/>
-              <a:t>10/10/2026</a:t>
+              <a:t>23/10/2026</a:t>
             </a:fld>
             <a:endParaRPr lang="fr-FR"/>
           </a:p>
@@ -10043,7 +10031,7 @@
           <a:p>
             <a:fld id="{3688A0B3-F8E5-4028-8F78-AD1068B82EBB}" type="datetimeFigureOut">
               <a:rPr lang="fr-FR" smtClean="0"/>
-              <a:t>10/10/2026</a:t>
+              <a:t>23/10/2026</a:t>
             </a:fld>
             <a:endParaRPr lang="fr-FR"/>
           </a:p>
@@ -10156,7 +10144,7 @@
           <a:p>
             <a:fld id="{3688A0B3-F8E5-4028-8F78-AD1068B82EBB}" type="datetimeFigureOut">
               <a:rPr lang="fr-FR" smtClean="0"/>
-              <a:t>10/10/2026</a:t>
+              <a:t>23/10/2026</a:t>
             </a:fld>
             <a:endParaRPr lang="fr-FR"/>
           </a:p>
@@ -10467,7 +10455,7 @@
           <a:p>
             <a:fld id="{3688A0B3-F8E5-4028-8F78-AD1068B82EBB}" type="datetimeFigureOut">
               <a:rPr lang="fr-FR" smtClean="0"/>
-              <a:t>10/10/2026</a:t>
+              <a:t>23/10/2026</a:t>
             </a:fld>
             <a:endParaRPr lang="fr-FR"/>
           </a:p>
@@ -10755,7 +10743,7 @@
           <a:p>
             <a:fld id="{3688A0B3-F8E5-4028-8F78-AD1068B82EBB}" type="datetimeFigureOut">
               <a:rPr lang="fr-FR" smtClean="0"/>
-              <a:t>10/10/2026</a:t>
+              <a:t>23/10/2026</a:t>
             </a:fld>
             <a:endParaRPr lang="fr-FR"/>
           </a:p>
@@ -10996,7 +10984,7 @@
           <a:p>
             <a:fld id="{3688A0B3-F8E5-4028-8F78-AD1068B82EBB}" type="datetimeFigureOut">
               <a:rPr lang="fr-FR" smtClean="0"/>
-              <a:t>10/10/2026</a:t>
+              <a:t>23/10/2026</a:t>
             </a:fld>
             <a:endParaRPr lang="fr-FR"/>
           </a:p>
@@ -12382,13 +12370,13 @@
           <a:p>
             <a:r>
               <a:rPr lang="fr-FR" sz="1400" dirty="0"/>
-              <a:t>Durée mesurée : 8 secondes </a:t>
+              <a:t>Durée mesurée : 17,4 secondes </a:t>
             </a:r>
           </a:p>
           <a:p>
             <a:r>
               <a:rPr lang="fr-FR" sz="1400" dirty="0"/>
-              <a:t>Estimation pour 4 millions : 8,9 heures</a:t>
+              <a:t>Estimation pour 4 millions : 19,4 heures</a:t>
             </a:r>
             <a:endParaRPr lang="fr-FR" dirty="0">
               <a:solidFill>
@@ -13256,581 +13244,6 @@
       </p:sp>
       <p:sp>
         <p:nvSpPr>
-          <p:cNvPr id="13" name="ZoneTexte 12">
-            <a:extLst>
-              <a:ext uri="{FF2B5EF4-FFF2-40B4-BE49-F238E27FC236}">
-                <a16:creationId xmlns:a16="http://schemas.microsoft.com/office/drawing/2014/main" id="{811F893A-AEE1-630D-0E51-844DFDCF38EC}"/>
-              </a:ext>
-            </a:extLst>
-          </p:cNvPr>
-          <p:cNvSpPr txBox="1"/>
-          <p:nvPr/>
-        </p:nvSpPr>
-        <p:spPr>
-          <a:xfrm>
-            <a:off x="609600" y="2374899"/>
-            <a:ext cx="5270500" cy="419100"/>
-          </a:xfrm>
-          <a:prstGeom prst="rect">
-            <a:avLst/>
-          </a:prstGeom>
-          <a:noFill/>
-        </p:spPr>
-        <p:txBody>
-          <a:bodyPr vert="horz" wrap="square" lIns="0" tIns="0" rIns="0" bIns="0" rtlCol="0">
-            <a:noAutofit/>
-          </a:bodyPr>
-          <a:lstStyle/>
-          <a:p>
-            <a:r>
-              <a:rPr lang="fr-FR" sz="2500" b="1" dirty="0">
-                <a:solidFill>
-                  <a:srgbClr val="172F43"/>
-                </a:solidFill>
-                <a:latin typeface="Arial" panose="020B0604020202020204" pitchFamily="34" charset="0"/>
-              </a:rPr>
-              <a:t>En une fois</a:t>
-            </a:r>
-          </a:p>
-        </p:txBody>
-      </p:sp>
-      <p:sp>
-        <p:nvSpPr>
-          <p:cNvPr id="14" name="ZoneTexte 13">
-            <a:extLst>
-              <a:ext uri="{FF2B5EF4-FFF2-40B4-BE49-F238E27FC236}">
-                <a16:creationId xmlns:a16="http://schemas.microsoft.com/office/drawing/2014/main" id="{DBB2697E-80C5-9489-4E7E-7FAF14A64F95}"/>
-              </a:ext>
-            </a:extLst>
-          </p:cNvPr>
-          <p:cNvSpPr txBox="1"/>
-          <p:nvPr/>
-        </p:nvSpPr>
-        <p:spPr>
-          <a:xfrm>
-            <a:off x="609600" y="2920999"/>
-            <a:ext cx="5270500" cy="673100"/>
-          </a:xfrm>
-          <a:prstGeom prst="rect">
-            <a:avLst/>
-          </a:prstGeom>
-          <a:noFill/>
-        </p:spPr>
-        <p:txBody>
-          <a:bodyPr vert="horz" wrap="square" lIns="0" tIns="0" rIns="0" bIns="0" rtlCol="0">
-            <a:noAutofit/>
-          </a:bodyPr>
-          <a:lstStyle/>
-          <a:p>
-            <a:r>
-              <a:rPr lang="fr-FR" sz="3500" b="1" dirty="0">
-                <a:solidFill>
-                  <a:srgbClr val="007F82"/>
-                </a:solidFill>
-                <a:latin typeface="Arial" panose="020B0604020202020204" pitchFamily="34" charset="0"/>
-              </a:rPr>
-              <a:t>68,86 € HT</a:t>
-            </a:r>
-          </a:p>
-        </p:txBody>
-      </p:sp>
-      <p:sp>
-        <p:nvSpPr>
-          <p:cNvPr id="15" name="ZoneTexte 14">
-            <a:extLst>
-              <a:ext uri="{FF2B5EF4-FFF2-40B4-BE49-F238E27FC236}">
-                <a16:creationId xmlns:a16="http://schemas.microsoft.com/office/drawing/2014/main" id="{3890D782-0A0D-5D45-EBBE-281B16F43802}"/>
-              </a:ext>
-            </a:extLst>
-          </p:cNvPr>
-          <p:cNvSpPr txBox="1"/>
-          <p:nvPr/>
-        </p:nvSpPr>
-        <p:spPr>
-          <a:xfrm>
-            <a:off x="609600" y="3695699"/>
-            <a:ext cx="5270500" cy="368300"/>
-          </a:xfrm>
-          <a:prstGeom prst="rect">
-            <a:avLst/>
-          </a:prstGeom>
-          <a:noFill/>
-        </p:spPr>
-        <p:txBody>
-          <a:bodyPr vert="horz" wrap="square" lIns="0" tIns="0" rIns="0" bIns="0" rtlCol="0">
-            <a:noAutofit/>
-          </a:bodyPr>
-          <a:lstStyle/>
-          <a:p>
-            <a:r>
-              <a:rPr lang="fr-FR" sz="2000" dirty="0">
-                <a:solidFill>
-                  <a:srgbClr val="172F43"/>
-                </a:solidFill>
-                <a:latin typeface="Arial" panose="020B0604020202020204" pitchFamily="34" charset="0"/>
-              </a:rPr>
-              <a:t>4 millions au mois 1</a:t>
-            </a:r>
-          </a:p>
-        </p:txBody>
-      </p:sp>
-      <p:sp>
-        <p:nvSpPr>
-          <p:cNvPr id="22" name="ZoneTexte 21">
-            <a:extLst>
-              <a:ext uri="{FF2B5EF4-FFF2-40B4-BE49-F238E27FC236}">
-                <a16:creationId xmlns:a16="http://schemas.microsoft.com/office/drawing/2014/main" id="{ED072734-4974-6397-0AB1-41177A671D90}"/>
-              </a:ext>
-            </a:extLst>
-          </p:cNvPr>
-          <p:cNvSpPr txBox="1"/>
-          <p:nvPr/>
-        </p:nvSpPr>
-        <p:spPr>
-          <a:xfrm>
-            <a:off x="6413500" y="2374899"/>
-            <a:ext cx="5168900" cy="419100"/>
-          </a:xfrm>
-          <a:prstGeom prst="rect">
-            <a:avLst/>
-          </a:prstGeom>
-          <a:noFill/>
-        </p:spPr>
-        <p:txBody>
-          <a:bodyPr vert="horz" wrap="square" lIns="0" tIns="0" rIns="0" bIns="0" rtlCol="0">
-            <a:noAutofit/>
-          </a:bodyPr>
-          <a:lstStyle/>
-          <a:p>
-            <a:r>
-              <a:rPr lang="fr-FR" sz="2500" b="1" dirty="0">
-                <a:solidFill>
-                  <a:srgbClr val="172F43"/>
-                </a:solidFill>
-                <a:latin typeface="Arial" panose="020B0604020202020204" pitchFamily="34" charset="0"/>
-              </a:rPr>
-              <a:t>Chaque mois, sur un an</a:t>
-            </a:r>
-          </a:p>
-        </p:txBody>
-      </p:sp>
-      <p:sp>
-        <p:nvSpPr>
-          <p:cNvPr id="23" name="ZoneTexte 22">
-            <a:extLst>
-              <a:ext uri="{FF2B5EF4-FFF2-40B4-BE49-F238E27FC236}">
-                <a16:creationId xmlns:a16="http://schemas.microsoft.com/office/drawing/2014/main" id="{7526DBB8-FEA0-E434-E340-9E8D00C2852B}"/>
-              </a:ext>
-            </a:extLst>
-          </p:cNvPr>
-          <p:cNvSpPr txBox="1"/>
-          <p:nvPr/>
-        </p:nvSpPr>
-        <p:spPr>
-          <a:xfrm>
-            <a:off x="6413500" y="2920999"/>
-            <a:ext cx="5168900" cy="673100"/>
-          </a:xfrm>
-          <a:prstGeom prst="rect">
-            <a:avLst/>
-          </a:prstGeom>
-          <a:noFill/>
-        </p:spPr>
-        <p:txBody>
-          <a:bodyPr vert="horz" wrap="square" lIns="0" tIns="0" rIns="0" bIns="0" rtlCol="0">
-            <a:noAutofit/>
-          </a:bodyPr>
-          <a:lstStyle/>
-          <a:p>
-            <a:r>
-              <a:rPr lang="fr-FR" sz="3500" b="1">
-                <a:solidFill>
-                  <a:srgbClr val="007F82"/>
-                </a:solidFill>
-                <a:latin typeface="Arial" panose="020B0604020202020204" pitchFamily="34" charset="0"/>
-              </a:rPr>
-              <a:t>103,61 </a:t>
-            </a:r>
-            <a:r>
-              <a:rPr lang="fr-FR" sz="3500" b="1" dirty="0">
-                <a:solidFill>
-                  <a:srgbClr val="007F82"/>
-                </a:solidFill>
-                <a:latin typeface="Arial" panose="020B0604020202020204" pitchFamily="34" charset="0"/>
-              </a:rPr>
-              <a:t>€ HT</a:t>
-            </a:r>
-          </a:p>
-        </p:txBody>
-      </p:sp>
-      <p:sp>
-        <p:nvSpPr>
-          <p:cNvPr id="24" name="ZoneTexte 23">
-            <a:extLst>
-              <a:ext uri="{FF2B5EF4-FFF2-40B4-BE49-F238E27FC236}">
-                <a16:creationId xmlns:a16="http://schemas.microsoft.com/office/drawing/2014/main" id="{81B20EE6-E99F-1DBC-3797-1DF344C5CCA4}"/>
-              </a:ext>
-            </a:extLst>
-          </p:cNvPr>
-          <p:cNvSpPr txBox="1"/>
-          <p:nvPr/>
-        </p:nvSpPr>
-        <p:spPr>
-          <a:xfrm>
-            <a:off x="6413500" y="3695699"/>
-            <a:ext cx="5168900" cy="368300"/>
-          </a:xfrm>
-          <a:prstGeom prst="rect">
-            <a:avLst/>
-          </a:prstGeom>
-          <a:noFill/>
-        </p:spPr>
-        <p:txBody>
-          <a:bodyPr vert="horz" wrap="square" lIns="0" tIns="0" rIns="0" bIns="0" rtlCol="0">
-            <a:noAutofit/>
-          </a:bodyPr>
-          <a:lstStyle/>
-          <a:p>
-            <a:r>
-              <a:rPr lang="fr-FR" sz="2000" dirty="0">
-                <a:solidFill>
-                  <a:srgbClr val="172F43"/>
-                </a:solidFill>
-                <a:latin typeface="Arial" panose="020B0604020202020204" pitchFamily="34" charset="0"/>
-              </a:rPr>
-              <a:t>Environ 333 333 images / mois</a:t>
-            </a:r>
-          </a:p>
-        </p:txBody>
-      </p:sp>
-      <p:sp>
-        <p:nvSpPr>
-          <p:cNvPr id="25" name="ZoneTexte 24">
-            <a:extLst>
-              <a:ext uri="{FF2B5EF4-FFF2-40B4-BE49-F238E27FC236}">
-                <a16:creationId xmlns:a16="http://schemas.microsoft.com/office/drawing/2014/main" id="{2EA9B0B6-64EC-F06E-2FC0-3442316BFF62}"/>
-              </a:ext>
-            </a:extLst>
-          </p:cNvPr>
-          <p:cNvSpPr txBox="1"/>
-          <p:nvPr/>
-        </p:nvSpPr>
-        <p:spPr>
-          <a:xfrm>
-            <a:off x="609600" y="4241799"/>
-            <a:ext cx="5270500" cy="355600"/>
-          </a:xfrm>
-          <a:prstGeom prst="rect">
-            <a:avLst/>
-          </a:prstGeom>
-          <a:noFill/>
-        </p:spPr>
-        <p:txBody>
-          <a:bodyPr vert="horz" wrap="square" lIns="0" tIns="0" rIns="0" bIns="0" rtlCol="0">
-            <a:noAutofit/>
-          </a:bodyPr>
-          <a:lstStyle/>
-          <a:p>
-            <a:r>
-              <a:rPr lang="fr-FR" dirty="0">
-                <a:solidFill>
-                  <a:srgbClr val="172F43"/>
-                </a:solidFill>
-                <a:latin typeface="Arial" panose="020B0604020202020204" pitchFamily="34" charset="0"/>
-              </a:rPr>
-              <a:t>Calcul : 9 h × 2,2798 €/h = 20,51 €</a:t>
-            </a:r>
-          </a:p>
-        </p:txBody>
-      </p:sp>
-      <p:sp>
-        <p:nvSpPr>
-          <p:cNvPr id="26" name="ZoneTexte 25">
-            <a:extLst>
-              <a:ext uri="{FF2B5EF4-FFF2-40B4-BE49-F238E27FC236}">
-                <a16:creationId xmlns:a16="http://schemas.microsoft.com/office/drawing/2014/main" id="{02C4FB12-7CD8-8CB3-91E4-DFCEC879D5B2}"/>
-              </a:ext>
-            </a:extLst>
-          </p:cNvPr>
-          <p:cNvSpPr txBox="1"/>
-          <p:nvPr/>
-        </p:nvSpPr>
-        <p:spPr>
-          <a:xfrm>
-            <a:off x="609600" y="4648199"/>
-            <a:ext cx="5270500" cy="355600"/>
-          </a:xfrm>
-          <a:prstGeom prst="rect">
-            <a:avLst/>
-          </a:prstGeom>
-          <a:noFill/>
-        </p:spPr>
-        <p:txBody>
-          <a:bodyPr vert="horz" wrap="square" lIns="0" tIns="0" rIns="0" bIns="0" rtlCol="0">
-            <a:noAutofit/>
-          </a:bodyPr>
-          <a:lstStyle/>
-          <a:p>
-            <a:r>
-              <a:rPr lang="fr-FR" dirty="0">
-                <a:solidFill>
-                  <a:srgbClr val="172F43"/>
-                </a:solidFill>
-                <a:latin typeface="Arial" panose="020B0604020202020204" pitchFamily="34" charset="0"/>
-              </a:rPr>
-              <a:t>Images : 12 mois × 1,97815 € = 23,74 €</a:t>
-            </a:r>
-          </a:p>
-        </p:txBody>
-      </p:sp>
-      <p:sp>
-        <p:nvSpPr>
-          <p:cNvPr id="27" name="ZoneTexte 26">
-            <a:extLst>
-              <a:ext uri="{FF2B5EF4-FFF2-40B4-BE49-F238E27FC236}">
-                <a16:creationId xmlns:a16="http://schemas.microsoft.com/office/drawing/2014/main" id="{8869FAB3-5DEC-72A1-CCCF-26E5FF430F26}"/>
-              </a:ext>
-            </a:extLst>
-          </p:cNvPr>
-          <p:cNvSpPr txBox="1"/>
-          <p:nvPr/>
-        </p:nvSpPr>
-        <p:spPr>
-          <a:xfrm>
-            <a:off x="609600" y="5054599"/>
-            <a:ext cx="5270500" cy="355600"/>
-          </a:xfrm>
-          <a:prstGeom prst="rect">
-            <a:avLst/>
-          </a:prstGeom>
-          <a:noFill/>
-        </p:spPr>
-        <p:txBody>
-          <a:bodyPr vert="horz" wrap="square" lIns="0" tIns="0" rIns="0" bIns="0" rtlCol="0">
-            <a:noAutofit/>
-          </a:bodyPr>
-          <a:lstStyle/>
-          <a:p>
-            <a:r>
-              <a:rPr lang="fr-FR" dirty="0">
-                <a:solidFill>
-                  <a:srgbClr val="172F43"/>
-                </a:solidFill>
-                <a:latin typeface="Arial" panose="020B0604020202020204" pitchFamily="34" charset="0"/>
-              </a:rPr>
-              <a:t>Disque : 1 mois × 4,148 € = 4,15 €</a:t>
-            </a:r>
-          </a:p>
-        </p:txBody>
-      </p:sp>
-      <p:sp>
-        <p:nvSpPr>
-          <p:cNvPr id="28" name="ZoneTexte 27">
-            <a:extLst>
-              <a:ext uri="{FF2B5EF4-FFF2-40B4-BE49-F238E27FC236}">
-                <a16:creationId xmlns:a16="http://schemas.microsoft.com/office/drawing/2014/main" id="{98A40DFC-A682-8522-95D2-F72D1D16E3A7}"/>
-              </a:ext>
-            </a:extLst>
-          </p:cNvPr>
-          <p:cNvSpPr txBox="1"/>
-          <p:nvPr/>
-        </p:nvSpPr>
-        <p:spPr>
-          <a:xfrm>
-            <a:off x="609600" y="5930899"/>
-            <a:ext cx="5270500" cy="355600"/>
-          </a:xfrm>
-          <a:prstGeom prst="rect">
-            <a:avLst/>
-          </a:prstGeom>
-          <a:noFill/>
-        </p:spPr>
-        <p:txBody>
-          <a:bodyPr vert="horz" wrap="square" lIns="0" tIns="0" rIns="0" bIns="0" rtlCol="0">
-            <a:noAutofit/>
-          </a:bodyPr>
-          <a:lstStyle/>
-          <a:p>
-            <a:r>
-              <a:rPr lang="fr-FR">
-                <a:solidFill>
-                  <a:srgbClr val="536473"/>
-                </a:solidFill>
-                <a:latin typeface="Arial" panose="020B0604020202020204" pitchFamily="34" charset="0"/>
-              </a:rPr>
-              <a:t>Main d’œuvre exclu</a:t>
-            </a:r>
-            <a:endParaRPr lang="fr-FR" dirty="0">
-              <a:solidFill>
-                <a:srgbClr val="172F43"/>
-              </a:solidFill>
-              <a:latin typeface="Arial" panose="020B0604020202020204" pitchFamily="34" charset="0"/>
-            </a:endParaRPr>
-          </a:p>
-        </p:txBody>
-      </p:sp>
-      <p:sp>
-        <p:nvSpPr>
-          <p:cNvPr id="29" name="ZoneTexte 28">
-            <a:extLst>
-              <a:ext uri="{FF2B5EF4-FFF2-40B4-BE49-F238E27FC236}">
-                <a16:creationId xmlns:a16="http://schemas.microsoft.com/office/drawing/2014/main" id="{1375E4CF-4636-70C5-4B90-95DCB5A59BA1}"/>
-              </a:ext>
-            </a:extLst>
-          </p:cNvPr>
-          <p:cNvSpPr txBox="1"/>
-          <p:nvPr/>
-        </p:nvSpPr>
-        <p:spPr>
-          <a:xfrm>
-            <a:off x="6413500" y="4241799"/>
-            <a:ext cx="5168900" cy="355600"/>
-          </a:xfrm>
-          <a:prstGeom prst="rect">
-            <a:avLst/>
-          </a:prstGeom>
-          <a:noFill/>
-        </p:spPr>
-        <p:txBody>
-          <a:bodyPr vert="horz" wrap="square" lIns="0" tIns="0" rIns="0" bIns="0" rtlCol="0">
-            <a:noAutofit/>
-          </a:bodyPr>
-          <a:lstStyle/>
-          <a:p>
-            <a:r>
-              <a:rPr lang="fr-FR" dirty="0">
-                <a:solidFill>
-                  <a:srgbClr val="172F43"/>
-                </a:solidFill>
-                <a:latin typeface="Arial" panose="020B0604020202020204" pitchFamily="34" charset="0"/>
-              </a:rPr>
-              <a:t>Calcul : 9 h × 2,2798 €/h = 20,51 €</a:t>
-            </a:r>
-          </a:p>
-        </p:txBody>
-      </p:sp>
-      <p:sp>
-        <p:nvSpPr>
-          <p:cNvPr id="30" name="ZoneTexte 29">
-            <a:extLst>
-              <a:ext uri="{FF2B5EF4-FFF2-40B4-BE49-F238E27FC236}">
-                <a16:creationId xmlns:a16="http://schemas.microsoft.com/office/drawing/2014/main" id="{960C4C70-E218-EAC5-B2C4-F660AC17E772}"/>
-              </a:ext>
-            </a:extLst>
-          </p:cNvPr>
-          <p:cNvSpPr txBox="1"/>
-          <p:nvPr/>
-        </p:nvSpPr>
-        <p:spPr>
-          <a:xfrm>
-            <a:off x="6413500" y="4648199"/>
-            <a:ext cx="5168900" cy="355600"/>
-          </a:xfrm>
-          <a:prstGeom prst="rect">
-            <a:avLst/>
-          </a:prstGeom>
-          <a:noFill/>
-        </p:spPr>
-        <p:txBody>
-          <a:bodyPr vert="horz" wrap="square" lIns="0" tIns="0" rIns="0" bIns="0" rtlCol="0">
-            <a:noAutofit/>
-          </a:bodyPr>
-          <a:lstStyle/>
-          <a:p>
-            <a:r>
-              <a:rPr lang="fr-FR" dirty="0">
-                <a:solidFill>
-                  <a:srgbClr val="172F43"/>
-                </a:solidFill>
-                <a:latin typeface="Arial" panose="020B0604020202020204" pitchFamily="34" charset="0"/>
-              </a:rPr>
-              <a:t>Stockage progressif des images : 12,86 €</a:t>
-            </a:r>
-          </a:p>
-        </p:txBody>
-      </p:sp>
-      <p:sp>
-        <p:nvSpPr>
-          <p:cNvPr id="31" name="ZoneTexte 30">
-            <a:extLst>
-              <a:ext uri="{FF2B5EF4-FFF2-40B4-BE49-F238E27FC236}">
-                <a16:creationId xmlns:a16="http://schemas.microsoft.com/office/drawing/2014/main" id="{BA862111-9A49-FCC5-958B-4974B12A95AF}"/>
-              </a:ext>
-            </a:extLst>
-          </p:cNvPr>
-          <p:cNvSpPr txBox="1"/>
-          <p:nvPr/>
-        </p:nvSpPr>
-        <p:spPr>
-          <a:xfrm>
-            <a:off x="6413500" y="5054599"/>
-            <a:ext cx="5168900" cy="355600"/>
-          </a:xfrm>
-          <a:prstGeom prst="rect">
-            <a:avLst/>
-          </a:prstGeom>
-          <a:noFill/>
-        </p:spPr>
-        <p:txBody>
-          <a:bodyPr vert="horz" wrap="square" lIns="0" tIns="0" rIns="0" bIns="0" rtlCol="0">
-            <a:noAutofit/>
-          </a:bodyPr>
-          <a:lstStyle/>
-          <a:p>
-            <a:r>
-              <a:rPr lang="fr-FR" dirty="0">
-                <a:solidFill>
-                  <a:srgbClr val="172F43"/>
-                </a:solidFill>
-                <a:latin typeface="Arial" panose="020B0604020202020204" pitchFamily="34" charset="0"/>
-              </a:rPr>
-              <a:t>Disque : 12 mois × 4,148 € = 49,78 €</a:t>
-            </a:r>
-          </a:p>
-        </p:txBody>
-      </p:sp>
-      <p:sp>
-        <p:nvSpPr>
-          <p:cNvPr id="32" name="ZoneTexte 31">
-            <a:extLst>
-              <a:ext uri="{FF2B5EF4-FFF2-40B4-BE49-F238E27FC236}">
-                <a16:creationId xmlns:a16="http://schemas.microsoft.com/office/drawing/2014/main" id="{0FB7AABA-5F5D-6D17-B3AF-ECAE470C64A7}"/>
-              </a:ext>
-            </a:extLst>
-          </p:cNvPr>
-          <p:cNvSpPr txBox="1"/>
-          <p:nvPr/>
-        </p:nvSpPr>
-        <p:spPr>
-          <a:xfrm>
-            <a:off x="6413500" y="5460999"/>
-            <a:ext cx="5168900" cy="355600"/>
-          </a:xfrm>
-          <a:prstGeom prst="rect">
-            <a:avLst/>
-          </a:prstGeom>
-          <a:noFill/>
-        </p:spPr>
-        <p:txBody>
-          <a:bodyPr vert="horz" wrap="square" lIns="0" tIns="0" rIns="0" bIns="0" rtlCol="0">
-            <a:noAutofit/>
-          </a:bodyPr>
-          <a:lstStyle/>
-          <a:p>
-            <a:r>
-              <a:rPr lang="fr-FR" dirty="0">
-                <a:solidFill>
-                  <a:srgbClr val="172F43"/>
-                </a:solidFill>
-                <a:latin typeface="Arial" panose="020B0604020202020204" pitchFamily="34" charset="0"/>
-              </a:rPr>
-              <a:t>Accès : 20,45 €</a:t>
-            </a:r>
-          </a:p>
-        </p:txBody>
-      </p:sp>
-      <p:sp>
-        <p:nvSpPr>
           <p:cNvPr id="34" name="ZoneTexte 33">
             <a:hlinkClick r:id="rId3"/>
             <a:extLst>
@@ -13912,46 +13325,6 @@
       </p:sp>
       <p:sp>
         <p:nvSpPr>
-          <p:cNvPr id="2" name="ZoneTexte 1">
-            <a:extLst>
-              <a:ext uri="{FF2B5EF4-FFF2-40B4-BE49-F238E27FC236}">
-                <a16:creationId xmlns:a16="http://schemas.microsoft.com/office/drawing/2014/main" id="{F59C40E2-3131-5768-795C-8C1A29EA40B1}"/>
-              </a:ext>
-            </a:extLst>
-          </p:cNvPr>
-          <p:cNvSpPr txBox="1"/>
-          <p:nvPr/>
-        </p:nvSpPr>
-        <p:spPr>
-          <a:xfrm>
-            <a:off x="609601" y="5397499"/>
-            <a:ext cx="5168900" cy="355600"/>
-          </a:xfrm>
-          <a:prstGeom prst="rect">
-            <a:avLst/>
-          </a:prstGeom>
-          <a:noFill/>
-        </p:spPr>
-        <p:txBody>
-          <a:bodyPr vert="horz" wrap="square" lIns="0" tIns="0" rIns="0" bIns="0" rtlCol="0">
-            <a:noAutofit/>
-          </a:bodyPr>
-          <a:lstStyle/>
-          <a:p>
-            <a:r>
-              <a:rPr lang="fr-FR" dirty="0">
-                <a:solidFill>
-                  <a:srgbClr val="172F43"/>
-                </a:solidFill>
-                <a:latin typeface="Arial" panose="020B0604020202020204" pitchFamily="34" charset="0"/>
-              </a:rPr>
-              <a:t>Accès : 20,45 €</a:t>
-            </a:r>
-          </a:p>
-        </p:txBody>
-      </p:sp>
-      <p:sp>
-        <p:nvSpPr>
           <p:cNvPr id="5" name="ZoneTexte 4">
             <a:extLst>
               <a:ext uri="{FF2B5EF4-FFF2-40B4-BE49-F238E27FC236}">
@@ -13988,6 +13361,621 @@
               <a:t>Coût pour 4 millions d'images</a:t>
             </a:r>
             <a:endParaRPr lang="fr-FR" sz="1400" dirty="0"/>
+          </a:p>
+        </p:txBody>
+      </p:sp>
+      <p:sp>
+        <p:nvSpPr>
+          <p:cNvPr id="6" name="ZoneTexte 5">
+            <a:extLst>
+              <a:ext uri="{FF2B5EF4-FFF2-40B4-BE49-F238E27FC236}">
+                <a16:creationId xmlns:a16="http://schemas.microsoft.com/office/drawing/2014/main" id="{341A08FF-BCEA-C104-4755-4AB1526721D6}"/>
+              </a:ext>
+            </a:extLst>
+          </p:cNvPr>
+          <p:cNvSpPr txBox="1"/>
+          <p:nvPr/>
+        </p:nvSpPr>
+        <p:spPr>
+          <a:xfrm>
+            <a:off x="609600" y="2374899"/>
+            <a:ext cx="5270500" cy="419100"/>
+          </a:xfrm>
+          <a:prstGeom prst="rect">
+            <a:avLst/>
+          </a:prstGeom>
+          <a:noFill/>
+        </p:spPr>
+        <p:txBody>
+          <a:bodyPr vert="horz" wrap="square" lIns="0" tIns="0" rIns="0" bIns="0" rtlCol="0">
+            <a:noAutofit/>
+          </a:bodyPr>
+          <a:lstStyle/>
+          <a:p>
+            <a:r>
+              <a:rPr lang="fr-FR" sz="2500" b="1" dirty="0">
+                <a:solidFill>
+                  <a:srgbClr val="172F43"/>
+                </a:solidFill>
+                <a:latin typeface="Arial" panose="020B0604020202020204" pitchFamily="34" charset="0"/>
+              </a:rPr>
+              <a:t>En une fois</a:t>
+            </a:r>
+          </a:p>
+        </p:txBody>
+      </p:sp>
+      <p:sp>
+        <p:nvSpPr>
+          <p:cNvPr id="8" name="ZoneTexte 7">
+            <a:extLst>
+              <a:ext uri="{FF2B5EF4-FFF2-40B4-BE49-F238E27FC236}">
+                <a16:creationId xmlns:a16="http://schemas.microsoft.com/office/drawing/2014/main" id="{372185E6-A708-1994-A74B-0EB7CE9F9D33}"/>
+              </a:ext>
+            </a:extLst>
+          </p:cNvPr>
+          <p:cNvSpPr txBox="1"/>
+          <p:nvPr/>
+        </p:nvSpPr>
+        <p:spPr>
+          <a:xfrm>
+            <a:off x="609600" y="2920999"/>
+            <a:ext cx="5270500" cy="673100"/>
+          </a:xfrm>
+          <a:prstGeom prst="rect">
+            <a:avLst/>
+          </a:prstGeom>
+          <a:noFill/>
+        </p:spPr>
+        <p:txBody>
+          <a:bodyPr vert="horz" wrap="square" lIns="0" tIns="0" rIns="0" bIns="0" rtlCol="0">
+            <a:noAutofit/>
+          </a:bodyPr>
+          <a:lstStyle/>
+          <a:p>
+            <a:r>
+              <a:rPr lang="fr-FR" sz="3500" b="1" dirty="0">
+                <a:solidFill>
+                  <a:srgbClr val="007F82"/>
+                </a:solidFill>
+                <a:latin typeface="Arial" panose="020B0604020202020204" pitchFamily="34" charset="0"/>
+              </a:rPr>
+              <a:t>68,86 € HT</a:t>
+            </a:r>
+          </a:p>
+        </p:txBody>
+      </p:sp>
+      <p:sp>
+        <p:nvSpPr>
+          <p:cNvPr id="17" name="ZoneTexte 16">
+            <a:extLst>
+              <a:ext uri="{FF2B5EF4-FFF2-40B4-BE49-F238E27FC236}">
+                <a16:creationId xmlns:a16="http://schemas.microsoft.com/office/drawing/2014/main" id="{71E28936-3358-D5A2-60B5-0D7203186226}"/>
+              </a:ext>
+            </a:extLst>
+          </p:cNvPr>
+          <p:cNvSpPr txBox="1"/>
+          <p:nvPr/>
+        </p:nvSpPr>
+        <p:spPr>
+          <a:xfrm>
+            <a:off x="609600" y="3695699"/>
+            <a:ext cx="5270500" cy="368300"/>
+          </a:xfrm>
+          <a:prstGeom prst="rect">
+            <a:avLst/>
+          </a:prstGeom>
+          <a:noFill/>
+        </p:spPr>
+        <p:txBody>
+          <a:bodyPr vert="horz" wrap="square" lIns="0" tIns="0" rIns="0" bIns="0" rtlCol="0">
+            <a:noAutofit/>
+          </a:bodyPr>
+          <a:lstStyle/>
+          <a:p>
+            <a:r>
+              <a:rPr lang="fr-FR" sz="2000" dirty="0">
+                <a:solidFill>
+                  <a:srgbClr val="172F43"/>
+                </a:solidFill>
+                <a:latin typeface="Arial" panose="020B0604020202020204" pitchFamily="34" charset="0"/>
+              </a:rPr>
+              <a:t>4 millions au mois 1</a:t>
+            </a:r>
+          </a:p>
+        </p:txBody>
+      </p:sp>
+      <p:sp>
+        <p:nvSpPr>
+          <p:cNvPr id="19" name="ZoneTexte 18">
+            <a:extLst>
+              <a:ext uri="{FF2B5EF4-FFF2-40B4-BE49-F238E27FC236}">
+                <a16:creationId xmlns:a16="http://schemas.microsoft.com/office/drawing/2014/main" id="{C7CE68E6-E4B8-A253-F250-1ADBB6187CC1}"/>
+              </a:ext>
+            </a:extLst>
+          </p:cNvPr>
+          <p:cNvSpPr txBox="1"/>
+          <p:nvPr/>
+        </p:nvSpPr>
+        <p:spPr>
+          <a:xfrm>
+            <a:off x="6413500" y="2374899"/>
+            <a:ext cx="5168900" cy="419100"/>
+          </a:xfrm>
+          <a:prstGeom prst="rect">
+            <a:avLst/>
+          </a:prstGeom>
+          <a:noFill/>
+        </p:spPr>
+        <p:txBody>
+          <a:bodyPr vert="horz" wrap="square" lIns="0" tIns="0" rIns="0" bIns="0" rtlCol="0">
+            <a:noAutofit/>
+          </a:bodyPr>
+          <a:lstStyle/>
+          <a:p>
+            <a:r>
+              <a:rPr lang="fr-FR" sz="2500" b="1" dirty="0">
+                <a:solidFill>
+                  <a:srgbClr val="172F43"/>
+                </a:solidFill>
+                <a:latin typeface="Arial" panose="020B0604020202020204" pitchFamily="34" charset="0"/>
+              </a:rPr>
+              <a:t>Chaque mois, sur un an</a:t>
+            </a:r>
+          </a:p>
+        </p:txBody>
+      </p:sp>
+      <p:sp>
+        <p:nvSpPr>
+          <p:cNvPr id="21" name="ZoneTexte 20">
+            <a:extLst>
+              <a:ext uri="{FF2B5EF4-FFF2-40B4-BE49-F238E27FC236}">
+                <a16:creationId xmlns:a16="http://schemas.microsoft.com/office/drawing/2014/main" id="{DC43CA4E-62A8-FC54-E84C-106504997A39}"/>
+              </a:ext>
+            </a:extLst>
+          </p:cNvPr>
+          <p:cNvSpPr txBox="1"/>
+          <p:nvPr/>
+        </p:nvSpPr>
+        <p:spPr>
+          <a:xfrm>
+            <a:off x="6413500" y="2920999"/>
+            <a:ext cx="5168900" cy="673100"/>
+          </a:xfrm>
+          <a:prstGeom prst="rect">
+            <a:avLst/>
+          </a:prstGeom>
+          <a:noFill/>
+        </p:spPr>
+        <p:txBody>
+          <a:bodyPr vert="horz" wrap="square" lIns="0" tIns="0" rIns="0" bIns="0" rtlCol="0">
+            <a:noAutofit/>
+          </a:bodyPr>
+          <a:lstStyle/>
+          <a:p>
+            <a:r>
+              <a:rPr lang="fr-FR" sz="3500" b="1">
+                <a:solidFill>
+                  <a:srgbClr val="007F82"/>
+                </a:solidFill>
+                <a:latin typeface="Arial" panose="020B0604020202020204" pitchFamily="34" charset="0"/>
+              </a:rPr>
+              <a:t>103,61 </a:t>
+            </a:r>
+            <a:r>
+              <a:rPr lang="fr-FR" sz="3500" b="1" dirty="0">
+                <a:solidFill>
+                  <a:srgbClr val="007F82"/>
+                </a:solidFill>
+                <a:latin typeface="Arial" panose="020B0604020202020204" pitchFamily="34" charset="0"/>
+              </a:rPr>
+              <a:t>€ HT</a:t>
+            </a:r>
+          </a:p>
+        </p:txBody>
+      </p:sp>
+      <p:sp>
+        <p:nvSpPr>
+          <p:cNvPr id="35" name="ZoneTexte 34">
+            <a:extLst>
+              <a:ext uri="{FF2B5EF4-FFF2-40B4-BE49-F238E27FC236}">
+                <a16:creationId xmlns:a16="http://schemas.microsoft.com/office/drawing/2014/main" id="{E551D716-680F-EFE3-D455-16F7EF7298D6}"/>
+              </a:ext>
+            </a:extLst>
+          </p:cNvPr>
+          <p:cNvSpPr txBox="1"/>
+          <p:nvPr/>
+        </p:nvSpPr>
+        <p:spPr>
+          <a:xfrm>
+            <a:off x="6413500" y="3695699"/>
+            <a:ext cx="5168900" cy="368300"/>
+          </a:xfrm>
+          <a:prstGeom prst="rect">
+            <a:avLst/>
+          </a:prstGeom>
+          <a:noFill/>
+        </p:spPr>
+        <p:txBody>
+          <a:bodyPr vert="horz" wrap="square" lIns="0" tIns="0" rIns="0" bIns="0" rtlCol="0">
+            <a:noAutofit/>
+          </a:bodyPr>
+          <a:lstStyle/>
+          <a:p>
+            <a:r>
+              <a:rPr lang="fr-FR" sz="2000" dirty="0">
+                <a:solidFill>
+                  <a:srgbClr val="172F43"/>
+                </a:solidFill>
+                <a:latin typeface="Arial" panose="020B0604020202020204" pitchFamily="34" charset="0"/>
+              </a:rPr>
+              <a:t>Environ 333 333 images / mois</a:t>
+            </a:r>
+          </a:p>
+        </p:txBody>
+      </p:sp>
+      <p:sp>
+        <p:nvSpPr>
+          <p:cNvPr id="37" name="ZoneTexte 36">
+            <a:extLst>
+              <a:ext uri="{FF2B5EF4-FFF2-40B4-BE49-F238E27FC236}">
+                <a16:creationId xmlns:a16="http://schemas.microsoft.com/office/drawing/2014/main" id="{56A9617A-6DB5-C1F5-55B5-C0362AE40D06}"/>
+              </a:ext>
+            </a:extLst>
+          </p:cNvPr>
+          <p:cNvSpPr txBox="1"/>
+          <p:nvPr/>
+        </p:nvSpPr>
+        <p:spPr>
+          <a:xfrm>
+            <a:off x="609600" y="4241799"/>
+            <a:ext cx="5270500" cy="355600"/>
+          </a:xfrm>
+          <a:prstGeom prst="rect">
+            <a:avLst/>
+          </a:prstGeom>
+          <a:noFill/>
+        </p:spPr>
+        <p:txBody>
+          <a:bodyPr vert="horz" wrap="square" lIns="0" tIns="0" rIns="0" bIns="0" rtlCol="0">
+            <a:noAutofit/>
+          </a:bodyPr>
+          <a:lstStyle/>
+          <a:p>
+            <a:r>
+              <a:rPr lang="fr-FR" dirty="0">
+                <a:solidFill>
+                  <a:srgbClr val="172F43"/>
+                </a:solidFill>
+                <a:latin typeface="Arial" panose="020B0604020202020204" pitchFamily="34" charset="0"/>
+              </a:rPr>
+              <a:t>Calcul : 9 h × 2,2798 €/h = 20,51 €</a:t>
+            </a:r>
+          </a:p>
+        </p:txBody>
+      </p:sp>
+      <p:sp>
+        <p:nvSpPr>
+          <p:cNvPr id="39" name="ZoneTexte 38">
+            <a:extLst>
+              <a:ext uri="{FF2B5EF4-FFF2-40B4-BE49-F238E27FC236}">
+                <a16:creationId xmlns:a16="http://schemas.microsoft.com/office/drawing/2014/main" id="{751865F1-AA65-37B1-3C64-C24619000D1E}"/>
+              </a:ext>
+            </a:extLst>
+          </p:cNvPr>
+          <p:cNvSpPr txBox="1"/>
+          <p:nvPr/>
+        </p:nvSpPr>
+        <p:spPr>
+          <a:xfrm>
+            <a:off x="609600" y="4648199"/>
+            <a:ext cx="5270500" cy="355600"/>
+          </a:xfrm>
+          <a:prstGeom prst="rect">
+            <a:avLst/>
+          </a:prstGeom>
+          <a:noFill/>
+        </p:spPr>
+        <p:txBody>
+          <a:bodyPr vert="horz" wrap="square" lIns="0" tIns="0" rIns="0" bIns="0" rtlCol="0">
+            <a:noAutofit/>
+          </a:bodyPr>
+          <a:lstStyle/>
+          <a:p>
+            <a:r>
+              <a:rPr lang="fr-FR" dirty="0">
+                <a:solidFill>
+                  <a:srgbClr val="172F43"/>
+                </a:solidFill>
+                <a:latin typeface="Arial" panose="020B0604020202020204" pitchFamily="34" charset="0"/>
+              </a:rPr>
+              <a:t>Images : 12 mois × 1,97815 € = 23,74 €</a:t>
+            </a:r>
+          </a:p>
+        </p:txBody>
+      </p:sp>
+      <p:sp>
+        <p:nvSpPr>
+          <p:cNvPr id="41" name="ZoneTexte 40">
+            <a:extLst>
+              <a:ext uri="{FF2B5EF4-FFF2-40B4-BE49-F238E27FC236}">
+                <a16:creationId xmlns:a16="http://schemas.microsoft.com/office/drawing/2014/main" id="{D139086B-A6A7-8043-A729-839250AD60F6}"/>
+              </a:ext>
+            </a:extLst>
+          </p:cNvPr>
+          <p:cNvSpPr txBox="1"/>
+          <p:nvPr/>
+        </p:nvSpPr>
+        <p:spPr>
+          <a:xfrm>
+            <a:off x="609600" y="5054599"/>
+            <a:ext cx="5270500" cy="355600"/>
+          </a:xfrm>
+          <a:prstGeom prst="rect">
+            <a:avLst/>
+          </a:prstGeom>
+          <a:noFill/>
+        </p:spPr>
+        <p:txBody>
+          <a:bodyPr vert="horz" wrap="square" lIns="0" tIns="0" rIns="0" bIns="0" rtlCol="0">
+            <a:noAutofit/>
+          </a:bodyPr>
+          <a:lstStyle/>
+          <a:p>
+            <a:r>
+              <a:rPr lang="fr-FR" dirty="0">
+                <a:solidFill>
+                  <a:srgbClr val="172F43"/>
+                </a:solidFill>
+                <a:latin typeface="Arial" panose="020B0604020202020204" pitchFamily="34" charset="0"/>
+              </a:rPr>
+              <a:t>Disque : 1 mois × 4,148 € = 4,15 €</a:t>
+            </a:r>
+          </a:p>
+        </p:txBody>
+      </p:sp>
+      <p:sp>
+        <p:nvSpPr>
+          <p:cNvPr id="43" name="ZoneTexte 42">
+            <a:extLst>
+              <a:ext uri="{FF2B5EF4-FFF2-40B4-BE49-F238E27FC236}">
+                <a16:creationId xmlns:a16="http://schemas.microsoft.com/office/drawing/2014/main" id="{F8355F9F-E9BD-2CB9-234E-09A76E241B7D}"/>
+              </a:ext>
+            </a:extLst>
+          </p:cNvPr>
+          <p:cNvSpPr txBox="1"/>
+          <p:nvPr/>
+        </p:nvSpPr>
+        <p:spPr>
+          <a:xfrm>
+            <a:off x="609600" y="5930899"/>
+            <a:ext cx="5270500" cy="355600"/>
+          </a:xfrm>
+          <a:prstGeom prst="rect">
+            <a:avLst/>
+          </a:prstGeom>
+          <a:noFill/>
+        </p:spPr>
+        <p:txBody>
+          <a:bodyPr vert="horz" wrap="square" lIns="0" tIns="0" rIns="0" bIns="0" rtlCol="0">
+            <a:noAutofit/>
+          </a:bodyPr>
+          <a:lstStyle/>
+          <a:p>
+            <a:r>
+              <a:rPr lang="fr-FR">
+                <a:solidFill>
+                  <a:srgbClr val="536473"/>
+                </a:solidFill>
+                <a:latin typeface="Arial" panose="020B0604020202020204" pitchFamily="34" charset="0"/>
+              </a:rPr>
+              <a:t>Main d’œuvre exclu</a:t>
+            </a:r>
+            <a:endParaRPr lang="fr-FR" dirty="0">
+              <a:solidFill>
+                <a:srgbClr val="172F43"/>
+              </a:solidFill>
+              <a:latin typeface="Arial" panose="020B0604020202020204" pitchFamily="34" charset="0"/>
+            </a:endParaRPr>
+          </a:p>
+        </p:txBody>
+      </p:sp>
+      <p:sp>
+        <p:nvSpPr>
+          <p:cNvPr id="45" name="ZoneTexte 44">
+            <a:extLst>
+              <a:ext uri="{FF2B5EF4-FFF2-40B4-BE49-F238E27FC236}">
+                <a16:creationId xmlns:a16="http://schemas.microsoft.com/office/drawing/2014/main" id="{14307B13-0222-1DF7-D1E4-A27444B049F6}"/>
+              </a:ext>
+            </a:extLst>
+          </p:cNvPr>
+          <p:cNvSpPr txBox="1"/>
+          <p:nvPr/>
+        </p:nvSpPr>
+        <p:spPr>
+          <a:xfrm>
+            <a:off x="6413500" y="4241799"/>
+            <a:ext cx="5168900" cy="355600"/>
+          </a:xfrm>
+          <a:prstGeom prst="rect">
+            <a:avLst/>
+          </a:prstGeom>
+          <a:noFill/>
+        </p:spPr>
+        <p:txBody>
+          <a:bodyPr vert="horz" wrap="square" lIns="0" tIns="0" rIns="0" bIns="0" rtlCol="0">
+            <a:noAutofit/>
+          </a:bodyPr>
+          <a:lstStyle/>
+          <a:p>
+            <a:r>
+              <a:rPr lang="fr-FR" dirty="0">
+                <a:solidFill>
+                  <a:srgbClr val="172F43"/>
+                </a:solidFill>
+                <a:latin typeface="Arial" panose="020B0604020202020204" pitchFamily="34" charset="0"/>
+              </a:rPr>
+              <a:t>Calcul : 9 h × 2,2798 €/h = 20,51 €</a:t>
+            </a:r>
+          </a:p>
+        </p:txBody>
+      </p:sp>
+      <p:sp>
+        <p:nvSpPr>
+          <p:cNvPr id="47" name="ZoneTexte 46">
+            <a:extLst>
+              <a:ext uri="{FF2B5EF4-FFF2-40B4-BE49-F238E27FC236}">
+                <a16:creationId xmlns:a16="http://schemas.microsoft.com/office/drawing/2014/main" id="{B2A1575E-8A87-D7D6-0E0C-E5419D075553}"/>
+              </a:ext>
+            </a:extLst>
+          </p:cNvPr>
+          <p:cNvSpPr txBox="1"/>
+          <p:nvPr/>
+        </p:nvSpPr>
+        <p:spPr>
+          <a:xfrm>
+            <a:off x="6413500" y="4648199"/>
+            <a:ext cx="5168900" cy="355600"/>
+          </a:xfrm>
+          <a:prstGeom prst="rect">
+            <a:avLst/>
+          </a:prstGeom>
+          <a:noFill/>
+        </p:spPr>
+        <p:txBody>
+          <a:bodyPr vert="horz" wrap="square" lIns="0" tIns="0" rIns="0" bIns="0" rtlCol="0">
+            <a:noAutofit/>
+          </a:bodyPr>
+          <a:lstStyle/>
+          <a:p>
+            <a:r>
+              <a:rPr lang="fr-FR" dirty="0">
+                <a:solidFill>
+                  <a:srgbClr val="172F43"/>
+                </a:solidFill>
+                <a:latin typeface="Arial" panose="020B0604020202020204" pitchFamily="34" charset="0"/>
+              </a:rPr>
+              <a:t>Stockage progressif des images : 12,86 €</a:t>
+            </a:r>
+          </a:p>
+        </p:txBody>
+      </p:sp>
+      <p:sp>
+        <p:nvSpPr>
+          <p:cNvPr id="49" name="ZoneTexte 48">
+            <a:extLst>
+              <a:ext uri="{FF2B5EF4-FFF2-40B4-BE49-F238E27FC236}">
+                <a16:creationId xmlns:a16="http://schemas.microsoft.com/office/drawing/2014/main" id="{2CF540C7-FD8F-00D3-CCDC-FA66ABE843F8}"/>
+              </a:ext>
+            </a:extLst>
+          </p:cNvPr>
+          <p:cNvSpPr txBox="1"/>
+          <p:nvPr/>
+        </p:nvSpPr>
+        <p:spPr>
+          <a:xfrm>
+            <a:off x="6413500" y="5054599"/>
+            <a:ext cx="5168900" cy="355600"/>
+          </a:xfrm>
+          <a:prstGeom prst="rect">
+            <a:avLst/>
+          </a:prstGeom>
+          <a:noFill/>
+        </p:spPr>
+        <p:txBody>
+          <a:bodyPr vert="horz" wrap="square" lIns="0" tIns="0" rIns="0" bIns="0" rtlCol="0">
+            <a:noAutofit/>
+          </a:bodyPr>
+          <a:lstStyle/>
+          <a:p>
+            <a:r>
+              <a:rPr lang="fr-FR" dirty="0">
+                <a:solidFill>
+                  <a:srgbClr val="172F43"/>
+                </a:solidFill>
+                <a:latin typeface="Arial" panose="020B0604020202020204" pitchFamily="34" charset="0"/>
+              </a:rPr>
+              <a:t>Disque : 12 mois × 4,148 € = 49,78 €</a:t>
+            </a:r>
+          </a:p>
+        </p:txBody>
+      </p:sp>
+      <p:sp>
+        <p:nvSpPr>
+          <p:cNvPr id="51" name="ZoneTexte 50">
+            <a:extLst>
+              <a:ext uri="{FF2B5EF4-FFF2-40B4-BE49-F238E27FC236}">
+                <a16:creationId xmlns:a16="http://schemas.microsoft.com/office/drawing/2014/main" id="{CE7DE80B-0B94-4538-01B2-D0948D4EA6EF}"/>
+              </a:ext>
+            </a:extLst>
+          </p:cNvPr>
+          <p:cNvSpPr txBox="1"/>
+          <p:nvPr/>
+        </p:nvSpPr>
+        <p:spPr>
+          <a:xfrm>
+            <a:off x="6413500" y="5460999"/>
+            <a:ext cx="5168900" cy="355600"/>
+          </a:xfrm>
+          <a:prstGeom prst="rect">
+            <a:avLst/>
+          </a:prstGeom>
+          <a:noFill/>
+        </p:spPr>
+        <p:txBody>
+          <a:bodyPr vert="horz" wrap="square" lIns="0" tIns="0" rIns="0" bIns="0" rtlCol="0">
+            <a:noAutofit/>
+          </a:bodyPr>
+          <a:lstStyle/>
+          <a:p>
+            <a:r>
+              <a:rPr lang="fr-FR" dirty="0">
+                <a:solidFill>
+                  <a:srgbClr val="172F43"/>
+                </a:solidFill>
+                <a:latin typeface="Arial" panose="020B0604020202020204" pitchFamily="34" charset="0"/>
+              </a:rPr>
+              <a:t>Accès : 20,45 €</a:t>
+            </a:r>
+          </a:p>
+        </p:txBody>
+      </p:sp>
+      <p:sp>
+        <p:nvSpPr>
+          <p:cNvPr id="53" name="ZoneTexte 52">
+            <a:extLst>
+              <a:ext uri="{FF2B5EF4-FFF2-40B4-BE49-F238E27FC236}">
+                <a16:creationId xmlns:a16="http://schemas.microsoft.com/office/drawing/2014/main" id="{0FA25526-64A4-511B-5292-AA00545E8276}"/>
+              </a:ext>
+            </a:extLst>
+          </p:cNvPr>
+          <p:cNvSpPr txBox="1"/>
+          <p:nvPr/>
+        </p:nvSpPr>
+        <p:spPr>
+          <a:xfrm>
+            <a:off x="609601" y="5397499"/>
+            <a:ext cx="5168900" cy="355600"/>
+          </a:xfrm>
+          <a:prstGeom prst="rect">
+            <a:avLst/>
+          </a:prstGeom>
+          <a:noFill/>
+        </p:spPr>
+        <p:txBody>
+          <a:bodyPr vert="horz" wrap="square" lIns="0" tIns="0" rIns="0" bIns="0" rtlCol="0">
+            <a:noAutofit/>
+          </a:bodyPr>
+          <a:lstStyle/>
+          <a:p>
+            <a:r>
+              <a:rPr lang="fr-FR" dirty="0">
+                <a:solidFill>
+                  <a:srgbClr val="172F43"/>
+                </a:solidFill>
+                <a:latin typeface="Arial" panose="020B0604020202020204" pitchFamily="34" charset="0"/>
+              </a:rPr>
+              <a:t>Accès : 20,45 €</a:t>
+            </a:r>
           </a:p>
         </p:txBody>
       </p:sp>
@@ -15580,17 +15568,6 @@
 Aucune erreur de lecture</a:t>
             </a:r>
           </a:p>
-          <a:p>
-            <a:r>
-              <a:rPr lang="fr-FR" sz="1900" dirty="0">
-                <a:solidFill>
-                  <a:srgbClr val="172F43"/>
-                </a:solidFill>
-                <a:latin typeface="Arial" panose="020B0604020202020204" pitchFamily="34" charset="0"/>
-              </a:rPr>
-              <a:t>Pas de données manquantes identifiées</a:t>
-            </a:r>
-          </a:p>
         </p:txBody>
       </p:sp>
       <p:sp>
@@ -15823,7 +15800,7 @@
         <p:spPr>
           <a:xfrm>
             <a:off x="609600" y="1714499"/>
-            <a:ext cx="10972800" cy="736600"/>
+            <a:ext cx="10972800" cy="838200"/>
           </a:xfrm>
           <a:prstGeom prst="rect">
             <a:avLst/>
@@ -15837,14 +15814,31 @@
           <a:lstStyle/>
           <a:p>
             <a:r>
-              <a:rPr lang="fr-FR" sz="2200" dirty="0">
+              <a:rPr lang="fr-FR" b="1">
+                <a:solidFill>
+                  <a:srgbClr val="007F82"/>
+                </a:solidFill>
+                <a:latin typeface="Arial" panose="020B0604020202020204" pitchFamily="34" charset="0"/>
+              </a:rPr>
+              <a:t>Contrôle d’intégrité : 1 410 images vérifiées avec Pillow et Torchvision, aucune image corrompue détectée.</a:t>
+            </a:r>
+          </a:p>
+          <a:p>
+            <a:r>
+              <a:rPr lang="fr-FR">
                 <a:solidFill>
                   <a:srgbClr val="172F43"/>
                 </a:solidFill>
                 <a:latin typeface="Arial" panose="020B0604020202020204" pitchFamily="34" charset="0"/>
               </a:rPr>
-              <a:t>Égalisation des histogrammes : redistribuer les intensités des pixels pour ajuster le contraste, avant la normalisation.</a:t>
+              <a:t>Égalisation des histogrammes avant la normalisation pour ajuster le contraste.</a:t>
             </a:r>
+            <a:endParaRPr lang="fr-FR" dirty="0">
+              <a:solidFill>
+                <a:srgbClr val="172F43"/>
+              </a:solidFill>
+              <a:latin typeface="Arial" panose="020B0604020202020204" pitchFamily="34" charset="0"/>
+            </a:endParaRPr>
           </a:p>
         </p:txBody>
       </p:sp>
@@ -22335,7 +22329,7 @@
                 </a:solidFill>
                 <a:latin typeface="Arial" panose="020B0604020202020204" pitchFamily="34" charset="0"/>
               </a:rPr>
-              <a:t>Comparaison des deux entraînements CNN</a:t>
+              <a:t>Entraînements et diagnostic sur l’ensemble de validation</a:t>
             </a:r>
           </a:p>
         </p:txBody>
@@ -22654,8 +22648,8 @@
         </p:nvSpPr>
         <p:spPr>
           <a:xfrm>
-            <a:off x="609600" y="3581399"/>
-            <a:ext cx="7162800" cy="736600"/>
+            <a:off x="609600" y="3530600"/>
+            <a:ext cx="7874000" cy="800100"/>
           </a:xfrm>
           <a:prstGeom prst="rect">
             <a:avLst/>
@@ -22669,31 +22663,25 @@
           <a:lstStyle/>
           <a:p>
             <a:r>
-              <a:rPr lang="fr-FR" sz="1700">
+              <a:rPr lang="fr-FR" sz="1650" dirty="0">
                 <a:solidFill>
                   <a:srgbClr val="172F43"/>
                 </a:solidFill>
                 <a:latin typeface="Arial" panose="020B0604020202020204" pitchFamily="34" charset="0"/>
               </a:rPr>
-              <a:t>Le même CNN poursuit son entraînement : 0 = normal et 1 = cancer.</a:t>
+              <a:t>F2 train 0,969, validation 0,854, écart +11,5 points.</a:t>
             </a:r>
           </a:p>
           <a:p>
             <a:r>
-              <a:rPr lang="fr-FR" sz="1700">
+              <a:rPr lang="fr-FR" sz="1650" b="1" dirty="0">
                 <a:solidFill>
-                  <a:srgbClr val="172F43"/>
+                  <a:srgbClr val="007F82"/>
                 </a:solidFill>
                 <a:latin typeface="Arial" panose="020B0604020202020204" pitchFamily="34" charset="0"/>
               </a:rPr>
-              <a:t>Test faible : accuracy de 0,973 sur 263 images (accord avec K-Means).</a:t>
+              <a:t>Surapprentissage possible pour le semi-supervisé.</a:t>
             </a:r>
-            <a:endParaRPr lang="fr-FR" sz="1700" dirty="0">
-              <a:solidFill>
-                <a:srgbClr val="172F43"/>
-              </a:solidFill>
-              <a:latin typeface="Arial" panose="020B0604020202020204" pitchFamily="34" charset="0"/>
-            </a:endParaRPr>
           </a:p>
         </p:txBody>
       </p:sp>
@@ -22855,15 +22843,32 @@
           <a:p>
             <a:pPr algn="ctr"/>
             <a:r>
-              <a:rPr lang="fr-FR" sz="2300" dirty="0">
+              <a:rPr lang="fr-FR" sz="2100">
                 <a:solidFill>
                   <a:srgbClr val="172F43"/>
                 </a:solidFill>
                 <a:latin typeface="Arial" panose="020B0604020202020204" pitchFamily="34" charset="0"/>
               </a:rPr>
-              <a:t>Même test fort
-20 images</a:t>
+              <a:t>Validation forte</a:t>
             </a:r>
+          </a:p>
+          <a:p>
+            <a:pPr algn="ctr"/>
+            <a:r>
+              <a:rPr lang="fr-FR" sz="2100">
+                <a:solidFill>
+                  <a:srgbClr val="172F43"/>
+                </a:solidFill>
+                <a:latin typeface="Arial" panose="020B0604020202020204" pitchFamily="34" charset="0"/>
+              </a:rPr>
+              <a:t>16 images</a:t>
+            </a:r>
+            <a:endParaRPr lang="fr-FR" sz="2100" dirty="0">
+              <a:solidFill>
+                <a:srgbClr val="172F43"/>
+              </a:solidFill>
+              <a:latin typeface="Arial" panose="020B0604020202020204" pitchFamily="34" charset="0"/>
+            </a:endParaRPr>
           </a:p>
         </p:txBody>
       </p:sp>
@@ -23129,8 +23134,8 @@
         </p:nvSpPr>
         <p:spPr>
           <a:xfrm>
-            <a:off x="609600" y="5740399"/>
-            <a:ext cx="10972800" cy="622300"/>
+            <a:off x="609600" y="5562600"/>
+            <a:ext cx="10972800" cy="787400"/>
           </a:xfrm>
           <a:prstGeom prst="rect">
             <a:avLst/>
@@ -23144,39 +23149,32 @@
           <a:lstStyle/>
           <a:p>
             <a:r>
-              <a:rPr lang="fr-FR" sz="1900" dirty="0">
+              <a:rPr lang="fr-FR" sz="1450" b="1" dirty="0">
                 <a:solidFill>
-                  <a:srgbClr val="172F43"/>
+                  <a:srgbClr val="3978A9"/>
                 </a:solidFill>
                 <a:latin typeface="Arial" panose="020B0604020202020204" pitchFamily="34" charset="0"/>
               </a:rPr>
-              <a:t>ResNet18 </a:t>
+              <a:t>Supervisé : F2 train 0,943, validation 0,976, écart -3,2 points. Aucun surapprentissage observé.</a:t>
             </a:r>
+          </a:p>
+          <a:p>
+            <a:endParaRPr lang="fr-FR" sz="1450" dirty="0">
+              <a:solidFill>
+                <a:srgbClr val="536473"/>
+              </a:solidFill>
+              <a:latin typeface="Arial" panose="020B0604020202020204" pitchFamily="34" charset="0"/>
+            </a:endParaRPr>
+          </a:p>
+          <a:p>
             <a:r>
-              <a:rPr lang="fr-FR" sz="2000" dirty="0"/>
-              <a:t>conserve ses paramètres </a:t>
-            </a:r>
-            <a:r>
-              <a:rPr lang="fr-FR" sz="1900" dirty="0">
+              <a:rPr lang="fr-FR" sz="1600" dirty="0">
                 <a:solidFill>
-                  <a:srgbClr val="172F43"/>
+                  <a:srgbClr val="536473"/>
                 </a:solidFill>
                 <a:latin typeface="Arial" panose="020B0604020202020204" pitchFamily="34" charset="0"/>
               </a:rPr>
-              <a:t>pré-entraînés, ses couches sont gelées. </a:t>
-            </a:r>
-            <a:r>
-              <a:rPr lang="fr-FR" sz="2000" dirty="0"/>
-              <a:t>taux de 0,001 pour les trois phases. Seule sa dernière couche est entraînée pour classer les images en deux catégories</a:t>
-            </a:r>
-            <a:r>
-              <a:rPr lang="fr-FR" sz="1900" dirty="0">
-                <a:solidFill>
-                  <a:srgbClr val="172F43"/>
-                </a:solidFill>
-                <a:latin typeface="Arial" panose="020B0604020202020204" pitchFamily="34" charset="0"/>
-              </a:rPr>
-              <a:t>.</a:t>
+              <a:t>Essai de dropout et L2 sur le semi-supervisé sur la validation forte: Sans succès</a:t>
             </a:r>
           </a:p>
         </p:txBody>
@@ -23254,7 +23252,7 @@
                 </a:solidFill>
                 <a:latin typeface="Arial" panose="020B0604020202020204" pitchFamily="34" charset="0"/>
               </a:rPr>
-              <a:t>Résultats sur les mêmes 20 images de test</a:t>
+              <a:t>Sélection sur validation et résultats finaux sur l’ensemble de test</a:t>
             </a:r>
           </a:p>
         </p:txBody>
@@ -25434,8 +25432,8 @@
         </p:nvSpPr>
         <p:spPr>
           <a:xfrm>
-            <a:off x="6769100" y="4356099"/>
-            <a:ext cx="2336800" cy="393700"/>
+            <a:off x="6769100" y="4292600"/>
+            <a:ext cx="2336800" cy="546100"/>
           </a:xfrm>
           <a:prstGeom prst="rect">
             <a:avLst/>
@@ -25449,7 +25447,18 @@
           <a:lstStyle/>
           <a:p>
             <a:r>
-              <a:rPr lang="fr-FR" b="1">
+              <a:rPr lang="fr-FR" sz="1400" b="1">
+                <a:solidFill>
+                  <a:srgbClr val="007F82"/>
+                </a:solidFill>
+                <a:latin typeface="Arial" panose="020B0604020202020204" pitchFamily="34" charset="0"/>
+              </a:rPr>
+              <a:t>1 faux positif</a:t>
+            </a:r>
+          </a:p>
+          <a:p>
+            <a:r>
+              <a:rPr lang="fr-FR" sz="1400" b="1">
                 <a:solidFill>
                   <a:srgbClr val="007F82"/>
                 </a:solidFill>
@@ -25457,7 +25466,7 @@
               </a:rPr>
               <a:t>1 faux négatif</a:t>
             </a:r>
-            <a:endParaRPr lang="fr-FR" b="1" dirty="0">
+            <a:endParaRPr lang="fr-FR" sz="1400" b="1" dirty="0">
               <a:solidFill>
                 <a:srgbClr val="007F82"/>
               </a:solidFill>
@@ -25480,8 +25489,8 @@
         </p:nvSpPr>
         <p:spPr>
           <a:xfrm>
-            <a:off x="9321800" y="4356099"/>
-            <a:ext cx="2336800" cy="393700"/>
+            <a:off x="9321800" y="4292600"/>
+            <a:ext cx="2336800" cy="546100"/>
           </a:xfrm>
           <a:prstGeom prst="rect">
             <a:avLst/>
@@ -25495,7 +25504,18 @@
           <a:lstStyle/>
           <a:p>
             <a:r>
-              <a:rPr lang="fr-FR" b="1" dirty="0">
+              <a:rPr lang="fr-FR" sz="1400" b="1">
+                <a:solidFill>
+                  <a:srgbClr val="3978A9"/>
+                </a:solidFill>
+                <a:latin typeface="Arial" panose="020B0604020202020204" pitchFamily="34" charset="0"/>
+              </a:rPr>
+              <a:t>1 faux positif</a:t>
+            </a:r>
+          </a:p>
+          <a:p>
+            <a:r>
+              <a:rPr lang="fr-FR" sz="1400" b="1">
                 <a:solidFill>
                   <a:srgbClr val="3978A9"/>
                 </a:solidFill>
@@ -25503,6 +25523,12 @@
               </a:rPr>
               <a:t>1 faux négatif</a:t>
             </a:r>
+            <a:endParaRPr lang="fr-FR" sz="1400" b="1" dirty="0">
+              <a:solidFill>
+                <a:srgbClr val="3978A9"/>
+              </a:solidFill>
+              <a:latin typeface="Arial" panose="020B0604020202020204" pitchFamily="34" charset="0"/>
+            </a:endParaRPr>
           </a:p>
         </p:txBody>
       </p:sp>
@@ -25520,8 +25546,8 @@
         </p:nvSpPr>
         <p:spPr>
           <a:xfrm>
-            <a:off x="609600" y="5143499"/>
-            <a:ext cx="10972800" cy="660400"/>
+            <a:off x="609600" y="5054600"/>
+            <a:ext cx="10972800" cy="685800"/>
           </a:xfrm>
           <a:prstGeom prst="rect">
             <a:avLst/>
@@ -25535,26 +25561,15 @@
           <a:lstStyle/>
           <a:p>
             <a:r>
-              <a:rPr lang="fr-FR" b="1">
+              <a:rPr lang="fr-FR" sz="1650" b="1">
                 <a:solidFill>
                   <a:srgbClr val="172F43"/>
                 </a:solidFill>
                 <a:latin typeface="Arial" panose="020B0604020202020204" pitchFamily="34" charset="0"/>
               </a:rPr>
-              <a:t>Les deux CNN obtiennent les mêmes performances sur ce test.</a:t>
+              <a:t>Validation semi-supervisée : initial 0,854, dropout 0,526, L2 0,641. Les deux régularisations sont écartées.</a:t>
             </a:r>
-          </a:p>
-          <a:p>
-            <a:r>
-              <a:rPr lang="fr-FR" b="1">
-                <a:solidFill>
-                  <a:srgbClr val="172F43"/>
-                </a:solidFill>
-                <a:latin typeface="Arial" panose="020B0604020202020204" pitchFamily="34" charset="0"/>
-              </a:rPr>
-              <a:t>La phase faible n'apporte pas d'amélioration mesurée.</a:t>
-            </a:r>
-            <a:endParaRPr lang="fr-FR" b="1" dirty="0">
+            <a:endParaRPr lang="fr-FR" sz="1650" b="1" dirty="0">
               <a:solidFill>
                 <a:srgbClr val="172F43"/>
               </a:solidFill>
@@ -25577,8 +25592,8 @@
         </p:nvSpPr>
         <p:spPr>
           <a:xfrm>
-            <a:off x="609600" y="5905499"/>
-            <a:ext cx="10972800" cy="457200"/>
+            <a:off x="609600" y="5816600"/>
+            <a:ext cx="10972800" cy="546100"/>
           </a:xfrm>
           <a:prstGeom prst="rect">
             <a:avLst/>
@@ -25592,14 +25607,20 @@
           <a:lstStyle/>
           <a:p>
             <a:r>
-              <a:rPr lang="fr-FR" dirty="0">
+              <a:rPr lang="fr-FR" sz="1550">
                 <a:solidFill>
                   <a:srgbClr val="536473"/>
                 </a:solidFill>
                 <a:latin typeface="Arial" panose="020B0604020202020204" pitchFamily="34" charset="0"/>
               </a:rPr>
-              <a:t>Écart de F2 train/test : +6,9 points (semi-supervisé), +4,3 points (supervisé): Surapprentissage possible  pour le semi-supervisé</a:t>
+              <a:t>Test final : F2 cancer = 0,900 pour les deux modèles initiaux. Chaque matrice contient 1 faux positif et 1 faux négatif.</a:t>
             </a:r>
+            <a:endParaRPr lang="fr-FR" sz="1550" dirty="0">
+              <a:solidFill>
+                <a:srgbClr val="536473"/>
+              </a:solidFill>
+              <a:latin typeface="Arial" panose="020B0604020202020204" pitchFamily="34" charset="0"/>
+            </a:endParaRPr>
           </a:p>
         </p:txBody>
       </p:sp>
